--- a/reports/design_portfolio_overview.pptx
+++ b/reports/design_portfolio_overview.pptx
@@ -3130,7 +3130,7 @@
           <a:lstStyle/>
           <a:p>
             <a:r>
-              <a:t>Generated 2026-04-30 00:50 | Indexed architecture and run summary</a:t>
+              <a:t>Generated 2026-04-30 00:53 | Indexed architecture and run summary</a:t>
             </a:r>
           </a:p>
         </p:txBody>

--- a/reports/design_portfolio_overview.pptx
+++ b/reports/design_portfolio_overview.pptx
@@ -3130,7 +3130,7 @@
           <a:lstStyle/>
           <a:p>
             <a:r>
-              <a:t>Generated 2026-04-30 00:53 | Indexed architecture and run summary</a:t>
+              <a:t>Generated 2026-04-30 01:19 | Indexed architecture and run summary</a:t>
             </a:r>
           </a:p>
         </p:txBody>

--- a/reports/design_portfolio_overview.pptx
+++ b/reports/design_portfolio_overview.pptx
@@ -3130,7 +3130,7 @@
           <a:lstStyle/>
           <a:p>
             <a:r>
-              <a:t>Generated 2026-04-30 01:19 | Indexed architecture and run summary</a:t>
+              <a:t>Generated 2026-05-02 18:54 | Indexed architecture and run summary</a:t>
             </a:r>
           </a:p>
         </p:txBody>

--- a/reports/design_portfolio_overview.pptx
+++ b/reports/design_portfolio_overview.pptx
@@ -3130,7 +3130,7 @@
           <a:lstStyle/>
           <a:p>
             <a:r>
-              <a:t>Generated 2026-05-02 18:54 | Indexed architecture and run summary</a:t>
+              <a:t>Generated 2026-05-02 19:05 | Indexed architecture and run summary</a:t>
             </a:r>
           </a:p>
         </p:txBody>

--- a/reports/design_portfolio_overview.pptx
+++ b/reports/design_portfolio_overview.pptx
@@ -3130,7 +3130,7 @@
           <a:lstStyle/>
           <a:p>
             <a:r>
-              <a:t>Generated 2026-05-02 19:05 | Indexed architecture and run summary</a:t>
+              <a:t>Generated 2026-05-02 19:11 | Indexed architecture and run summary</a:t>
             </a:r>
           </a:p>
         </p:txBody>

--- a/reports/design_portfolio_overview.pptx
+++ b/reports/design_portfolio_overview.pptx
@@ -3130,7 +3130,7 @@
           <a:lstStyle/>
           <a:p>
             <a:r>
-              <a:t>Generated 2026-05-02 19:11 | Indexed architecture and run summary</a:t>
+              <a:t>Generated 2026-05-02 19:29 | Indexed architecture and run summary</a:t>
             </a:r>
           </a:p>
         </p:txBody>

--- a/reports/design_portfolio_overview.pptx
+++ b/reports/design_portfolio_overview.pptx
@@ -3130,7 +3130,7 @@
           <a:lstStyle/>
           <a:p>
             <a:r>
-              <a:t>Generated 2026-05-02 19:29 | Indexed architecture and run summary</a:t>
+              <a:t>Generated 2026-05-02 19:32 | Indexed architecture and run summary</a:t>
             </a:r>
           </a:p>
         </p:txBody>

--- a/reports/design_portfolio_overview.pptx
+++ b/reports/design_portfolio_overview.pptx
@@ -3130,7 +3130,7 @@
           <a:lstStyle/>
           <a:p>
             <a:r>
-              <a:t>Generated 2026-05-02 19:32 | Indexed architecture and run summary</a:t>
+              <a:t>Generated 2026-05-02 19:45 | Indexed architecture and run summary</a:t>
             </a:r>
           </a:p>
         </p:txBody>

--- a/reports/design_portfolio_overview.pptx
+++ b/reports/design_portfolio_overview.pptx
@@ -3130,7 +3130,7 @@
           <a:lstStyle/>
           <a:p>
             <a:r>
-              <a:t>Generated 2026-05-02 19:45 | Indexed architecture and run summary</a:t>
+              <a:t>Generated 2026-05-02 19:55 | Indexed architecture and run summary</a:t>
             </a:r>
           </a:p>
         </p:txBody>

--- a/reports/design_portfolio_overview.pptx
+++ b/reports/design_portfolio_overview.pptx
@@ -3130,7 +3130,7 @@
           <a:lstStyle/>
           <a:p>
             <a:r>
-              <a:t>Generated 2026-05-02 19:55 | Indexed architecture and run summary</a:t>
+              <a:t>Generated 2026-05-02 20:21 | Indexed architecture and run summary</a:t>
             </a:r>
           </a:p>
         </p:txBody>

--- a/reports/design_portfolio_overview.pptx
+++ b/reports/design_portfolio_overview.pptx
@@ -3130,7 +3130,7 @@
           <a:lstStyle/>
           <a:p>
             <a:r>
-              <a:t>Generated 2026-05-02 20:21 | Indexed architecture and run summary</a:t>
+              <a:t>Generated 2026-05-02 20:58 | Indexed architecture and run summary</a:t>
             </a:r>
           </a:p>
         </p:txBody>

--- a/reports/design_portfolio_overview.pptx
+++ b/reports/design_portfolio_overview.pptx
@@ -3130,7 +3130,7 @@
           <a:lstStyle/>
           <a:p>
             <a:r>
-              <a:t>Generated 2026-05-02 20:58 | Indexed architecture and run summary</a:t>
+              <a:t>Generated 2026-05-03 00:01 | Indexed architecture and run summary</a:t>
             </a:r>
           </a:p>
         </p:txBody>

--- a/reports/design_portfolio_overview.pptx
+++ b/reports/design_portfolio_overview.pptx
@@ -3130,7 +3130,7 @@
           <a:lstStyle/>
           <a:p>
             <a:r>
-              <a:t>Generated 2026-05-03 00:01 | Indexed architecture and run summary</a:t>
+              <a:t>Generated 2026-05-03 00:29 | Indexed architecture and run summary</a:t>
             </a:r>
           </a:p>
         </p:txBody>

--- a/reports/design_portfolio_overview.pptx
+++ b/reports/design_portfolio_overview.pptx
@@ -3130,7 +3130,7 @@
           <a:lstStyle/>
           <a:p>
             <a:r>
-              <a:t>Generated 2026-05-03 00:29 | Indexed architecture and run summary</a:t>
+              <a:t>Generated 2026-05-03 00:49 | Indexed architecture and run summary</a:t>
             </a:r>
           </a:p>
         </p:txBody>

--- a/reports/design_portfolio_overview.pptx
+++ b/reports/design_portfolio_overview.pptx
@@ -3130,7 +3130,7 @@
           <a:lstStyle/>
           <a:p>
             <a:r>
-              <a:t>Generated 2026-05-03 00:49 | Indexed architecture and run summary</a:t>
+              <a:t>Generated 2026-05-03 00:58 | Indexed architecture and run summary</a:t>
             </a:r>
           </a:p>
         </p:txBody>

--- a/reports/design_portfolio_overview.pptx
+++ b/reports/design_portfolio_overview.pptx
@@ -3130,7 +3130,7 @@
           <a:lstStyle/>
           <a:p>
             <a:r>
-              <a:t>Generated 2026-05-03 00:58 | Indexed architecture and run summary</a:t>
+              <a:t>Generated 2026-05-03 01:14 | Indexed architecture and run summary</a:t>
             </a:r>
           </a:p>
         </p:txBody>

--- a/reports/design_portfolio_overview.pptx
+++ b/reports/design_portfolio_overview.pptx
@@ -3130,7 +3130,7 @@
           <a:lstStyle/>
           <a:p>
             <a:r>
-              <a:t>Generated 2026-05-03 01:14 | Indexed architecture and run summary</a:t>
+              <a:t>Generated 2026-05-03 01:32 | Indexed architecture and run summary</a:t>
             </a:r>
           </a:p>
         </p:txBody>
